--- a/book/slides/pptx/ch06-tree.pptx
+++ b/book/slides/pptx/ch06-tree.pptx
@@ -4677,7 +4677,7 @@
                 <a:ea typeface="Noto Sans CJK SC"/>
                 <a:cs typeface="Segoe UI"/>
               </a:rPr>
-              <a:t>并查集：等价类问题（续）</a:t>
+              <a:t>并查集：等价类问题</a:t>
             </a:r>
           </a:p>
         </p:txBody>
@@ -6476,7 +6476,7 @@
                 <a:ea typeface="Noto Sans CJK SC"/>
                 <a:cs typeface="Segoe UI"/>
               </a:rPr>
-              <a:t>改进二：路径压缩（续）</a:t>
+              <a:t>改进二：路径压缩</a:t>
             </a:r>
           </a:p>
         </p:txBody>

--- a/book/slides/pptx/ch06-tree.pptx
+++ b/book/slides/pptx/ch06-tree.pptx
@@ -4677,7 +4677,7 @@
                 <a:ea typeface="Noto Sans CJK SC"/>
                 <a:cs typeface="Segoe UI"/>
               </a:rPr>
-              <a:t>并查集：等价类问题</a:t>
+              <a:t>并查集：等价类问题（续）</a:t>
             </a:r>
           </a:p>
         </p:txBody>
@@ -6476,7 +6476,7 @@
                 <a:ea typeface="Noto Sans CJK SC"/>
                 <a:cs typeface="Segoe UI"/>
               </a:rPr>
-              <a:t>改进二：路径压缩</a:t>
+              <a:t>改进二：路径压缩（续）</a:t>
             </a:r>
           </a:p>
         </p:txBody>
